--- a/public/fun/pack/pptx/talkpro/발표템플릿프리미엄_23_업무보고_터콰이즈골드.pptx
+++ b/public/fun/pack/pptx/talkpro/발표템플릿프리미엄_23_업무보고_터콰이즈골드.pptx
@@ -115,12 +115,12 @@
   <p:extLst>
     <p:ext uri="{521415D9-36F7-43E2-AB2F-B90AF26B5E84}">
       <p14:sectionLst xmlns:p14="http://schemas.microsoft.com/office/powerpoint/2010/main">
-        <p14:section name="시작" id="{3845AC7A-B23E-455A-8B9D-C7942F46EA91}">
+        <p14:section name="시작" id="{BA0E45EC-0889-40B9-BDB9-4CD17F7CECCB}">
           <p14:sldIdLst>
             <p14:sldId id="256"/>
           </p14:sldIdLst>
         </p14:section>
-        <p14:section name="본문" id="{1B2349A3-5B64-4BD2-B427-E7E43D97ABF0}">
+        <p14:section name="본문" id="{59B0FFF0-2B3C-4EE2-8F51-9753782935E6}">
           <p14:sldIdLst>
             <p14:sldId id="257"/>
             <p14:sldId id="258"/>
@@ -131,7 +131,7 @@
             <p14:sldId id="263"/>
           </p14:sldIdLst>
         </p14:section>
-        <p14:section name="마무리" id="{B3D37DF4-38AE-4E67-B69C-7033BEBC83F8}">
+        <p14:section name="마무리" id="{308D20F7-C6CB-42FE-9D04-AB3058194AF6}">
           <p14:sldIdLst>
             <p14:sldId id="264"/>
           </p14:sldIdLst>
@@ -1880,7 +1880,7 @@
             </a:lvl1pPr>
           </a:lstStyle>
           <a:p>
-            <a:fld id="{BCDCDBA0-EA8E-4BBD-89EA-19F7A66F78DD}" type="slidenum">
+            <a:fld id="{3A318D31-459A-4B24-B866-04C7016BA430}" type="slidenum">
               <a:rPr lang="en-US"/>
               <a:t>‹#›</a:t>
             </a:fld>
@@ -2598,7 +2598,7 @@
             </a:lvl1pPr>
           </a:lstStyle>
           <a:p>
-            <a:fld id="{87AB51CC-6B1A-482B-9CCB-2353189F8607}" type="slidenum">
+            <a:fld id="{9E87D159-0185-416B-A972-704194D10786}" type="slidenum">
               <a:rPr lang="en-US"/>
               <a:t>‹#›</a:t>
             </a:fld>
@@ -3351,7 +3351,7 @@
             </a:lvl1pPr>
           </a:lstStyle>
           <a:p>
-            <a:fld id="{AC5B2421-6C9A-4041-B812-9C186B5BE143}" type="slidenum">
+            <a:fld id="{E79AF0E2-5579-4AD2-A67A-037E0CB89F87}" type="slidenum">
               <a:rPr lang="en-US"/>
               <a:t>‹#›</a:t>
             </a:fld>
@@ -4306,7 +4306,7 @@
           <a:p>
             <a:r>
               <a:rPr lang="ko-KR"/>
-              <a:t>상반기 실적과 남은 일정입니다</a:t>
+              <a:t>지금까지의 실적과 남은 일정입니다</a:t>
             </a:r>
           </a:p>
         </p:txBody>
@@ -4334,7 +4334,7 @@
           <a:p>
             <a:r>
               <a:rPr lang="ko-KR"/>
-              <a:t>0000. 00. 00</a:t>
+              <a:t>날짜 입력</a:t>
             </a:r>
           </a:p>
         </p:txBody>
@@ -4419,7 +4419,7 @@
           <a:bodyPr/>
           <a:lstStyle/>
           <a:p>
-            <a:fld id="{4881564E-FC5B-42FC-A502-3DEC269A0857}" type="slidenum">
+            <a:fld id="{A07C8340-242C-4FCE-BBE3-658B1F1302CF}" type="slidenum">
               <a:rPr lang="en-US"/>
               <a:t>‹#›</a:t>
             </a:fld>
@@ -5509,7 +5509,7 @@
           <a:bodyPr/>
           <a:lstStyle/>
           <a:p>
-            <a:fld id="{CCD5A529-3ED6-4911-B931-DB853FA453C5}" type="slidenum">
+            <a:fld id="{C1626965-0655-4308-B2B0-F592E59B282A}" type="slidenum">
               <a:rPr lang="en-US"/>
               <a:t>‹#›</a:t>
             </a:fld>
@@ -5597,7 +5597,7 @@
           <a:bodyPr/>
           <a:lstStyle/>
           <a:p>
-            <a:fld id="{B6291937-008D-4FFC-B01C-8D9322C8ED62}" type="slidenum">
+            <a:fld id="{8451321B-4FE3-4F3B-AEEA-7CE4EEAAAD6B}" type="slidenum">
               <a:rPr lang="en-US"/>
               <a:t>‹#›</a:t>
             </a:fld>
@@ -6486,7 +6486,7 @@
           <a:bodyPr/>
           <a:lstStyle/>
           <a:p>
-            <a:fld id="{B7D30C1D-AAD1-4073-8735-789846689B7C}" type="slidenum">
+            <a:fld id="{70FAEE48-8682-4B3E-B689-A5AFCF28238E}" type="slidenum">
               <a:rPr lang="en-US"/>
               <a:t>‹#›</a:t>
             </a:fld>
@@ -7084,7 +7084,7 @@
           <a:bodyPr/>
           <a:lstStyle/>
           <a:p>
-            <a:fld id="{392E6DFF-BE40-408E-BF73-AAFCDB7CD359}" type="slidenum">
+            <a:fld id="{F92D26E4-DCEA-496C-8AAA-AE9D4A7E87AB}" type="slidenum">
               <a:rPr lang="en-US"/>
               <a:t>‹#›</a:t>
             </a:fld>
@@ -7267,7 +7267,7 @@
           <a:bodyPr/>
           <a:lstStyle/>
           <a:p>
-            <a:fld id="{68FF8151-2E0A-4597-8794-FAEE5FD730C6}" type="slidenum">
+            <a:fld id="{7C832D55-577D-4149-86A7-4234757939BD}" type="slidenum">
               <a:rPr lang="en-US"/>
               <a:t>‹#›</a:t>
             </a:fld>
@@ -8331,7 +8331,7 @@
           <a:bodyPr/>
           <a:lstStyle/>
           <a:p>
-            <a:fld id="{54AF6325-088F-41DB-B617-22EAEB0ED8AE}" type="slidenum">
+            <a:fld id="{8982E2E7-F109-4340-A99A-96CB8227D06A}" type="slidenum">
               <a:rPr lang="en-US"/>
               <a:t>‹#›</a:t>
             </a:fld>
